--- a/Materials/Slides/slides_w3.pptx
+++ b/Materials/Slides/slides_w3.pptx
@@ -21,20 +21,20 @@
     <p:sldId id="544" r:id="rId9"/>
     <p:sldId id="530" r:id="rId10"/>
     <p:sldId id="357" r:id="rId11"/>
-    <p:sldId id="553" r:id="rId12"/>
-    <p:sldId id="554" r:id="rId13"/>
-    <p:sldId id="556" r:id="rId14"/>
-    <p:sldId id="555" r:id="rId15"/>
-    <p:sldId id="543" r:id="rId16"/>
-    <p:sldId id="295" r:id="rId17"/>
-    <p:sldId id="296" r:id="rId18"/>
-    <p:sldId id="297" r:id="rId19"/>
-    <p:sldId id="308" r:id="rId20"/>
-    <p:sldId id="309" r:id="rId21"/>
-    <p:sldId id="563" r:id="rId22"/>
-    <p:sldId id="564" r:id="rId23"/>
-    <p:sldId id="354" r:id="rId24"/>
-    <p:sldId id="523" r:id="rId25"/>
+    <p:sldId id="297" r:id="rId12"/>
+    <p:sldId id="259" r:id="rId13"/>
+    <p:sldId id="310" r:id="rId14"/>
+    <p:sldId id="553" r:id="rId15"/>
+    <p:sldId id="554" r:id="rId16"/>
+    <p:sldId id="556" r:id="rId17"/>
+    <p:sldId id="555" r:id="rId18"/>
+    <p:sldId id="543" r:id="rId19"/>
+    <p:sldId id="295" r:id="rId20"/>
+    <p:sldId id="296" r:id="rId21"/>
+    <p:sldId id="308" r:id="rId22"/>
+    <p:sldId id="309" r:id="rId23"/>
+    <p:sldId id="564" r:id="rId24"/>
+    <p:sldId id="354" r:id="rId25"/>
     <p:sldId id="260" r:id="rId26"/>
   </p:sldIdLst>
   <p:sldSz cx="12192000" cy="6858000"/>
@@ -145,15 +145,37 @@
 </p:presentation>
 </file>
 
+<file path=ppt/revisionInfo.xml><?xml version="1.0" encoding="utf-8"?>
+<p1510:revInfo xmlns:a="http://schemas.openxmlformats.org/drawingml/2006/main" xmlns:r="http://schemas.openxmlformats.org/officeDocument/2006/relationships" xmlns:p1510="http://schemas.microsoft.com/office/powerpoint/2015/10/main">
+  <p1510:revLst>
+    <p1510:client id="{3B6D3A32-358D-49FC-8B3F-D94A730CE098}" v="1" dt="2025-11-24T11:03:53.903"/>
+  </p1510:revLst>
+</p1510:revInfo>
+</file>
+
 <file path=ppt/changesInfos/changesInfo1.xml><?xml version="1.0" encoding="utf-8"?>
 <pc:chgInfo xmlns:a="http://schemas.openxmlformats.org/drawingml/2006/main" xmlns:r="http://schemas.openxmlformats.org/officeDocument/2006/relationships" xmlns:ac="http://schemas.microsoft.com/office/drawing/2013/main/command" xmlns:pc="http://schemas.microsoft.com/office/powerpoint/2013/main/command">
   <pc:docChgLst>
     <pc:chgData name="Chris Moreh" userId="17b81281-9f29-44e0-9273-6dadbf6896a2" providerId="ADAL" clId="{BCF66164-2C9C-4B48-AFF3-6B0B0038345A}"/>
-    <pc:docChg chg="undo custSel delSld modSld sldOrd">
-      <pc:chgData name="Chris Moreh" userId="17b81281-9f29-44e0-9273-6dadbf6896a2" providerId="ADAL" clId="{BCF66164-2C9C-4B48-AFF3-6B0B0038345A}" dt="2025-11-24T10:58:31.525" v="54"/>
+    <pc:docChg chg="undo custSel addSld delSld modSld sldOrd">
+      <pc:chgData name="Chris Moreh" userId="17b81281-9f29-44e0-9273-6dadbf6896a2" providerId="ADAL" clId="{BCF66164-2C9C-4B48-AFF3-6B0B0038345A}" dt="2025-11-24T11:03:53.903" v="61"/>
       <pc:docMkLst>
         <pc:docMk/>
       </pc:docMkLst>
+      <pc:sldChg chg="add">
+        <pc:chgData name="Chris Moreh" userId="17b81281-9f29-44e0-9273-6dadbf6896a2" providerId="ADAL" clId="{BCF66164-2C9C-4B48-AFF3-6B0B0038345A}" dt="2025-11-24T11:03:53.903" v="61"/>
+        <pc:sldMkLst>
+          <pc:docMk/>
+          <pc:sldMk cId="0" sldId="259"/>
+        </pc:sldMkLst>
+      </pc:sldChg>
+      <pc:sldChg chg="ord">
+        <pc:chgData name="Chris Moreh" userId="17b81281-9f29-44e0-9273-6dadbf6896a2" providerId="ADAL" clId="{BCF66164-2C9C-4B48-AFF3-6B0B0038345A}" dt="2025-11-24T10:59:13.431" v="58"/>
+        <pc:sldMkLst>
+          <pc:docMk/>
+          <pc:sldMk cId="782263443" sldId="297"/>
+        </pc:sldMkLst>
+      </pc:sldChg>
       <pc:sldChg chg="modSp mod">
         <pc:chgData name="Chris Moreh" userId="17b81281-9f29-44e0-9273-6dadbf6896a2" providerId="ADAL" clId="{BCF66164-2C9C-4B48-AFF3-6B0B0038345A}" dt="2025-11-24T09:41:18.727" v="1" actId="20577"/>
         <pc:sldMkLst>
@@ -168,6 +190,13 @@
             <ac:spMk id="6" creationId="{24060982-6EE3-A8F1-75FE-C4BDB2FF3CBE}"/>
           </ac:spMkLst>
         </pc:spChg>
+      </pc:sldChg>
+      <pc:sldChg chg="add">
+        <pc:chgData name="Chris Moreh" userId="17b81281-9f29-44e0-9273-6dadbf6896a2" providerId="ADAL" clId="{BCF66164-2C9C-4B48-AFF3-6B0B0038345A}" dt="2025-11-24T11:03:53.903" v="61"/>
+        <pc:sldMkLst>
+          <pc:docMk/>
+          <pc:sldMk cId="0" sldId="310"/>
+        </pc:sldMkLst>
       </pc:sldChg>
       <pc:sldChg chg="ord">
         <pc:chgData name="Chris Moreh" userId="17b81281-9f29-44e0-9273-6dadbf6896a2" providerId="ADAL" clId="{BCF66164-2C9C-4B48-AFF3-6B0B0038345A}" dt="2025-11-24T10:58:31.525" v="54"/>
@@ -190,6 +219,13 @@
             <ac:spMk id="13" creationId="{2C10D394-C9B2-B03C-4136-7B6EEA8FFA9D}"/>
           </ac:spMkLst>
         </pc:spChg>
+      </pc:sldChg>
+      <pc:sldChg chg="del">
+        <pc:chgData name="Chris Moreh" userId="17b81281-9f29-44e0-9273-6dadbf6896a2" providerId="ADAL" clId="{BCF66164-2C9C-4B48-AFF3-6B0B0038345A}" dt="2025-11-24T10:59:56.307" v="60" actId="47"/>
+        <pc:sldMkLst>
+          <pc:docMk/>
+          <pc:sldMk cId="1301853266" sldId="523"/>
+        </pc:sldMkLst>
       </pc:sldChg>
       <pc:sldChg chg="del">
         <pc:chgData name="Chris Moreh" userId="17b81281-9f29-44e0-9273-6dadbf6896a2" providerId="ADAL" clId="{BCF66164-2C9C-4B48-AFF3-6B0B0038345A}" dt="2025-11-24T10:57:34.746" v="50" actId="47"/>
@@ -217,6 +253,13 @@
         <pc:sldMkLst>
           <pc:docMk/>
           <pc:sldMk cId="324367232" sldId="560"/>
+        </pc:sldMkLst>
+      </pc:sldChg>
+      <pc:sldChg chg="del">
+        <pc:chgData name="Chris Moreh" userId="17b81281-9f29-44e0-9273-6dadbf6896a2" providerId="ADAL" clId="{BCF66164-2C9C-4B48-AFF3-6B0B0038345A}" dt="2025-11-24T10:59:45.059" v="59" actId="47"/>
+        <pc:sldMkLst>
+          <pc:docMk/>
+          <pc:sldMk cId="3329067806" sldId="563"/>
         </pc:sldMkLst>
       </pc:sldChg>
     </pc:docChg>
@@ -890,7 +933,7 @@
           <a:p>
             <a:fld id="{18BDFEC3-8487-43E8-A154-7C12CBC1FFF2}" type="slidenum">
               <a:rPr lang="en-US" smtClean="0"/>
-              <a:t>12</a:t>
+              <a:t>15</a:t>
             </a:fld>
             <a:endParaRPr lang="en-US"/>
           </a:p>
@@ -974,7 +1017,7 @@
           <a:p>
             <a:fld id="{18BDFEC3-8487-43E8-A154-7C12CBC1FFF2}" type="slidenum">
               <a:rPr lang="en-US" smtClean="0"/>
-              <a:t>13</a:t>
+              <a:t>16</a:t>
             </a:fld>
             <a:endParaRPr lang="en-US"/>
           </a:p>
@@ -1058,7 +1101,7 @@
           <a:p>
             <a:fld id="{18BDFEC3-8487-43E8-A154-7C12CBC1FFF2}" type="slidenum">
               <a:rPr lang="en-US" smtClean="0"/>
-              <a:t>14</a:t>
+              <a:t>17</a:t>
             </a:fld>
             <a:endParaRPr lang="en-US"/>
           </a:p>
@@ -1142,91 +1185,7 @@
           <a:p>
             <a:fld id="{18BDFEC3-8487-43E8-A154-7C12CBC1FFF2}" type="slidenum">
               <a:rPr lang="en-US" smtClean="0"/>
-              <a:t>21</a:t>
-            </a:fld>
-            <a:endParaRPr lang="en-US"/>
-          </a:p>
-        </p:txBody>
-      </p:sp>
-    </p:spTree>
-    <p:extLst>
-      <p:ext uri="{BB962C8B-B14F-4D97-AF65-F5344CB8AC3E}">
-        <p14:creationId xmlns:p14="http://schemas.microsoft.com/office/powerpoint/2010/main" val="3874956691"/>
-      </p:ext>
-    </p:extLst>
-  </p:cSld>
-  <p:clrMapOvr>
-    <a:masterClrMapping/>
-  </p:clrMapOvr>
-</p:notes>
-</file>
-
-<file path=ppt/notesSlides/notesSlide14.xml><?xml version="1.0" encoding="utf-8"?>
-<p:notes xmlns:a="http://schemas.openxmlformats.org/drawingml/2006/main" xmlns:r="http://schemas.openxmlformats.org/officeDocument/2006/relationships" xmlns:p="http://schemas.openxmlformats.org/presentationml/2006/main">
-  <p:cSld>
-    <p:spTree>
-      <p:nvGrpSpPr>
-        <p:cNvPr id="1" name=""/>
-        <p:cNvGrpSpPr/>
-        <p:nvPr/>
-      </p:nvGrpSpPr>
-      <p:grpSpPr>
-        <a:xfrm>
-          <a:off x="0" y="0"/>
-          <a:ext cx="0" cy="0"/>
-          <a:chOff x="0" y="0"/>
-          <a:chExt cx="0" cy="0"/>
-        </a:xfrm>
-      </p:grpSpPr>
-      <p:sp>
-        <p:nvSpPr>
-          <p:cNvPr id="2" name="Slide Image Placeholder 1"/>
-          <p:cNvSpPr>
-            <a:spLocks noGrp="1" noRot="1" noChangeAspect="1"/>
-          </p:cNvSpPr>
-          <p:nvPr>
-            <p:ph type="sldImg"/>
-          </p:nvPr>
-        </p:nvSpPr>
-        <p:spPr/>
-      </p:sp>
-      <p:sp>
-        <p:nvSpPr>
-          <p:cNvPr id="3" name="Notes Placeholder 2"/>
-          <p:cNvSpPr>
-            <a:spLocks noGrp="1"/>
-          </p:cNvSpPr>
-          <p:nvPr>
-            <p:ph type="body" idx="1"/>
-          </p:nvPr>
-        </p:nvSpPr>
-        <p:spPr/>
-        <p:txBody>
-          <a:bodyPr/>
-          <a:lstStyle/>
-          <a:p>
-            <a:endParaRPr lang="en-GB" dirty="0"/>
-          </a:p>
-        </p:txBody>
-      </p:sp>
-      <p:sp>
-        <p:nvSpPr>
-          <p:cNvPr id="4" name="Slide Number Placeholder 3"/>
-          <p:cNvSpPr>
-            <a:spLocks noGrp="1"/>
-          </p:cNvSpPr>
-          <p:nvPr>
-            <p:ph type="sldNum" sz="quarter" idx="5"/>
-          </p:nvPr>
-        </p:nvSpPr>
-        <p:spPr/>
-        <p:txBody>
-          <a:bodyPr/>
-          <a:lstStyle/>
-          <a:p>
-            <a:fld id="{18BDFEC3-8487-43E8-A154-7C12CBC1FFF2}" type="slidenum">
-              <a:rPr lang="en-US" smtClean="0"/>
-              <a:t>22</a:t>
+              <a:t>23</a:t>
             </a:fld>
             <a:endParaRPr lang="en-US"/>
           </a:p>
@@ -1245,68 +1204,7 @@
 </p:notes>
 </file>
 
-<file path=ppt/notesSlides/notesSlide15.xml><?xml version="1.0" encoding="utf-8"?>
-<p:notes xmlns:a="http://schemas.openxmlformats.org/drawingml/2006/main" xmlns:r="http://schemas.openxmlformats.org/officeDocument/2006/relationships" xmlns:p="http://schemas.openxmlformats.org/presentationml/2006/main">
-  <p:cSld>
-    <p:spTree>
-      <p:nvGrpSpPr>
-        <p:cNvPr id="1" name=""/>
-        <p:cNvGrpSpPr/>
-        <p:nvPr/>
-      </p:nvGrpSpPr>
-      <p:grpSpPr>
-        <a:xfrm>
-          <a:off x="0" y="0"/>
-          <a:ext cx="0" cy="0"/>
-          <a:chOff x="0" y="0"/>
-          <a:chExt cx="0" cy="0"/>
-        </a:xfrm>
-      </p:grpSpPr>
-      <p:sp>
-        <p:nvSpPr>
-          <p:cNvPr id="2" name="Slide Image Placeholder 1"/>
-          <p:cNvSpPr>
-            <a:spLocks noGrp="1" noRot="1" noChangeAspect="1"/>
-          </p:cNvSpPr>
-          <p:nvPr>
-            <p:ph type="sldImg"/>
-          </p:nvPr>
-        </p:nvSpPr>
-        <p:spPr/>
-      </p:sp>
-      <p:sp>
-        <p:nvSpPr>
-          <p:cNvPr id="3" name="Notes Placeholder 2"/>
-          <p:cNvSpPr>
-            <a:spLocks noGrp="1"/>
-          </p:cNvSpPr>
-          <p:nvPr>
-            <p:ph type="body" idx="1"/>
-          </p:nvPr>
-        </p:nvSpPr>
-        <p:spPr/>
-        <p:txBody>
-          <a:bodyPr/>
-          <a:lstStyle/>
-          <a:p>
-            <a:endParaRPr lang="en-GB" dirty="0"/>
-          </a:p>
-        </p:txBody>
-      </p:sp>
-    </p:spTree>
-    <p:extLst>
-      <p:ext uri="{BB962C8B-B14F-4D97-AF65-F5344CB8AC3E}">
-        <p14:creationId xmlns:p14="http://schemas.microsoft.com/office/powerpoint/2010/main" val="957270204"/>
-      </p:ext>
-    </p:extLst>
-  </p:cSld>
-  <p:clrMapOvr>
-    <a:masterClrMapping/>
-  </p:clrMapOvr>
-</p:notes>
-</file>
-
-<file path=ppt/notesSlides/notesSlide16.xml><?xml version="1.0" encoding="utf-8"?>
+<file path=ppt/notesSlides/notesSlide14.xml><?xml version="1.0" encoding="utf-8"?>
 <p:notes xmlns:a="http://schemas.openxmlformats.org/drawingml/2006/main" xmlns:r="http://schemas.openxmlformats.org/officeDocument/2006/relationships" xmlns:p="http://schemas.openxmlformats.org/presentationml/2006/main">
   <p:cSld>
     <p:spTree>
@@ -1882,7 +1780,7 @@
           <a:p>
             <a:fld id="{18BDFEC3-8487-43E8-A154-7C12CBC1FFF2}" type="slidenum">
               <a:rPr lang="en-US" smtClean="0"/>
-              <a:t>11</a:t>
+              <a:t>14</a:t>
             </a:fld>
             <a:endParaRPr lang="en-US"/>
           </a:p>
@@ -11947,6 +11845,703 @@
           <a:chExt cx="0" cy="0"/>
         </a:xfrm>
       </p:grpSpPr>
+      <p:pic>
+        <p:nvPicPr>
+          <p:cNvPr id="3" name="Picture 2">
+            <a:extLst>
+              <a:ext uri="{FF2B5EF4-FFF2-40B4-BE49-F238E27FC236}">
+                <a16:creationId xmlns:a16="http://schemas.microsoft.com/office/drawing/2014/main" id="{031A31D3-72D3-4C2F-9E46-F962CBDEF629}"/>
+              </a:ext>
+            </a:extLst>
+          </p:cNvPr>
+          <p:cNvPicPr>
+            <a:picLocks noChangeAspect="1"/>
+          </p:cNvPicPr>
+          <p:nvPr/>
+        </p:nvPicPr>
+        <p:blipFill>
+          <a:blip r:embed="rId2"/>
+          <a:stretch>
+            <a:fillRect/>
+          </a:stretch>
+        </p:blipFill>
+        <p:spPr>
+          <a:xfrm>
+            <a:off x="1610418" y="348589"/>
+            <a:ext cx="8971167" cy="5909643"/>
+          </a:xfrm>
+          <a:prstGeom prst="rect">
+            <a:avLst/>
+          </a:prstGeom>
+        </p:spPr>
+      </p:pic>
+    </p:spTree>
+    <p:extLst>
+      <p:ext uri="{BB962C8B-B14F-4D97-AF65-F5344CB8AC3E}">
+        <p14:creationId xmlns:p14="http://schemas.microsoft.com/office/powerpoint/2010/main" val="782263443"/>
+      </p:ext>
+    </p:extLst>
+  </p:cSld>
+  <p:clrMapOvr>
+    <a:masterClrMapping/>
+  </p:clrMapOvr>
+  <mc:AlternateContent xmlns:mc="http://schemas.openxmlformats.org/markup-compatibility/2006" xmlns:p159="http://schemas.microsoft.com/office/powerpoint/2015/09/main">
+    <mc:Choice Requires="p159">
+      <p:transition spd="slow">
+        <p159:morph option="byObject"/>
+      </p:transition>
+    </mc:Choice>
+    <mc:Fallback xmlns="">
+      <p:transition spd="slow">
+        <p:fade/>
+      </p:transition>
+    </mc:Fallback>
+  </mc:AlternateContent>
+</p:sld>
+</file>
+
+<file path=ppt/slides/slide12.xml><?xml version="1.0" encoding="utf-8"?>
+<p:sld xmlns:a="http://schemas.openxmlformats.org/drawingml/2006/main" xmlns:r="http://schemas.openxmlformats.org/officeDocument/2006/relationships" xmlns:p="http://schemas.openxmlformats.org/presentationml/2006/main">
+  <p:cSld>
+    <p:spTree>
+      <p:nvGrpSpPr>
+        <p:cNvPr id="1" name=""/>
+        <p:cNvGrpSpPr/>
+        <p:nvPr/>
+      </p:nvGrpSpPr>
+      <p:grpSpPr>
+        <a:xfrm>
+          <a:off x="0" y="0"/>
+          <a:ext cx="0" cy="0"/>
+          <a:chOff x="0" y="0"/>
+          <a:chExt cx="0" cy="0"/>
+        </a:xfrm>
+      </p:grpSpPr>
+      <p:sp>
+        <p:nvSpPr>
+          <p:cNvPr id="2" name="Title 1">
+            <a:extLst>
+              <a:ext uri="{FF2B5EF4-FFF2-40B4-BE49-F238E27FC236}">
+                <a16:creationId xmlns:a16="http://schemas.microsoft.com/office/drawing/2014/main" id="{8C216D18-5879-951E-312D-F35B3AEFF7CC}"/>
+              </a:ext>
+            </a:extLst>
+          </p:cNvPr>
+          <p:cNvSpPr>
+            <a:spLocks noGrp="1"/>
+          </p:cNvSpPr>
+          <p:nvPr>
+            <p:ph type="title"/>
+          </p:nvPr>
+        </p:nvSpPr>
+        <p:spPr>
+          <a:prstGeom prst="rect">
+            <a:avLst/>
+          </a:prstGeom>
+        </p:spPr>
+        <p:txBody>
+          <a:bodyPr>
+            <a:normAutofit/>
+          </a:bodyPr>
+          <a:lstStyle/>
+          <a:p>
+            <a:r>
+              <a:t>Estimation</a:t>
+            </a:r>
+          </a:p>
+        </p:txBody>
+      </p:sp>
+      <p:sp>
+        <p:nvSpPr>
+          <p:cNvPr id="4" name="Text Placeholder 3">
+            <a:extLst>
+              <a:ext uri="{FF2B5EF4-FFF2-40B4-BE49-F238E27FC236}">
+                <a16:creationId xmlns:a16="http://schemas.microsoft.com/office/drawing/2014/main" id="{824213AC-B520-1C10-5083-9B4C825E476E}"/>
+              </a:ext>
+            </a:extLst>
+          </p:cNvPr>
+          <p:cNvSpPr>
+            <a:spLocks noGrp="1"/>
+          </p:cNvSpPr>
+          <p:nvPr>
+            <p:ph idx="1"/>
+          </p:nvPr>
+        </p:nvSpPr>
+        <p:spPr/>
+        <p:txBody>
+          <a:bodyPr/>
+          <a:lstStyle/>
+          <a:p>
+            <a:pPr lvl="0"/>
+            <a:r>
+              <a:rPr dirty="0"/>
+              <a:t>Association between </a:t>
+            </a:r>
+            <a:r>
+              <a:rPr i="1" dirty="0"/>
+              <a:t>inequality</a:t>
+            </a:r>
+            <a:r>
+              <a:rPr dirty="0"/>
+              <a:t> and </a:t>
+            </a:r>
+            <a:r>
+              <a:rPr i="1" dirty="0"/>
+              <a:t>social trust</a:t>
+            </a:r>
+            <a:r>
+              <a:rPr dirty="0"/>
+              <a:t> at cross-national comparative level (W3Ex1) (Wilkinson and Pickett 2010)</a:t>
+            </a:r>
+          </a:p>
+        </p:txBody>
+      </p:sp>
+      <p:sp>
+        <p:nvSpPr>
+          <p:cNvPr id="6" name="Footer Placeholder 5">
+            <a:extLst>
+              <a:ext uri="{FF2B5EF4-FFF2-40B4-BE49-F238E27FC236}">
+                <a16:creationId xmlns:a16="http://schemas.microsoft.com/office/drawing/2014/main" id="{B44277B0-3AC5-0D62-7994-A671EFD6E93E}"/>
+              </a:ext>
+            </a:extLst>
+          </p:cNvPr>
+          <p:cNvSpPr>
+            <a:spLocks noGrp="1"/>
+          </p:cNvSpPr>
+          <p:nvPr>
+            <p:ph type="ftr" sz="quarter" idx="11"/>
+          </p:nvPr>
+        </p:nvSpPr>
+        <p:spPr/>
+        <p:txBody>
+          <a:bodyPr/>
+          <a:lstStyle/>
+          <a:p>
+            <a:endParaRPr lang="en-GB"/>
+          </a:p>
+        </p:txBody>
+      </p:sp>
+      <p:sp>
+        <p:nvSpPr>
+          <p:cNvPr id="5" name="Slide Number Placeholder 8">
+            <a:extLst>
+              <a:ext uri="{FF2B5EF4-FFF2-40B4-BE49-F238E27FC236}">
+                <a16:creationId xmlns:a16="http://schemas.microsoft.com/office/drawing/2014/main" id="{CC8FF6EA-8682-2BC8-E9B8-C6157593BBD6}"/>
+              </a:ext>
+            </a:extLst>
+          </p:cNvPr>
+          <p:cNvSpPr>
+            <a:spLocks noGrp="1"/>
+          </p:cNvSpPr>
+          <p:nvPr>
+            <p:ph type="sldNum" sz="quarter" idx="12"/>
+          </p:nvPr>
+        </p:nvSpPr>
+        <p:spPr/>
+        <p:txBody>
+          <a:bodyPr/>
+          <a:lstStyle/>
+          <a:p>
+            <a:r>
+              <a:rPr lang="en-US" dirty="0"/>
+              <a:t>Slide </a:t>
+            </a:r>
+            <a:fld id="{C5EF2332-01BF-834F-8236-50238282D533}" type="slidenum">
+              <a:rPr lang="en-US" smtClean="0"/>
+              <a:pPr/>
+              <a:t>12</a:t>
+            </a:fld>
+            <a:endParaRPr lang="en-US" dirty="0"/>
+          </a:p>
+        </p:txBody>
+      </p:sp>
+      <p:pic>
+        <p:nvPicPr>
+          <p:cNvPr id="3" name="Picture 1" descr="Week_6_R_files/figure-pptx/unnamed-chunk-2-1.png"/>
+          <p:cNvPicPr>
+            <a:picLocks noGrp="1" noChangeAspect="1"/>
+          </p:cNvPicPr>
+          <p:nvPr/>
+        </p:nvPicPr>
+        <p:blipFill>
+          <a:blip r:embed="rId2"/>
+          <a:stretch>
+            <a:fillRect/>
+          </a:stretch>
+        </p:blipFill>
+        <p:spPr bwMode="auto">
+          <a:xfrm>
+            <a:off x="2305050" y="2271306"/>
+            <a:ext cx="7472178" cy="3736089"/>
+          </a:xfrm>
+          <a:prstGeom prst="rect">
+            <a:avLst/>
+          </a:prstGeom>
+          <a:noFill/>
+          <a:ln w="9525">
+            <a:noFill/>
+            <a:headEnd/>
+            <a:tailEnd/>
+          </a:ln>
+        </p:spPr>
+      </p:pic>
+    </p:spTree>
+  </p:cSld>
+  <p:clrMapOvr>
+    <a:masterClrMapping/>
+  </p:clrMapOvr>
+  <mc:AlternateContent xmlns:mc="http://schemas.openxmlformats.org/markup-compatibility/2006" xmlns:p159="http://schemas.microsoft.com/office/powerpoint/2015/09/main">
+    <mc:Choice Requires="p159">
+      <p:transition spd="slow">
+        <p159:morph option="byObject"/>
+      </p:transition>
+    </mc:Choice>
+    <mc:Fallback xmlns="">
+      <p:transition spd="slow">
+        <p:fade/>
+      </p:transition>
+    </mc:Fallback>
+  </mc:AlternateContent>
+  <p:timing>
+    <p:tnLst>
+      <p:par>
+        <p:cTn id="1" dur="indefinite" restart="never" nodeType="tmRoot">
+          <p:childTnLst>
+            <p:seq concurrent="1" nextAc="seek">
+              <p:cTn id="2" dur="indefinite" nodeType="mainSeq">
+                <p:childTnLst>
+                  <p:par>
+                    <p:cTn id="3" fill="hold">
+                      <p:stCondLst>
+                        <p:cond delay="indefinite"/>
+                      </p:stCondLst>
+                      <p:childTnLst>
+                        <p:par>
+                          <p:cTn id="4" fill="hold">
+                            <p:stCondLst>
+                              <p:cond delay="0"/>
+                            </p:stCondLst>
+                            <p:childTnLst>
+                              <p:par>
+                                <p:cTn id="5" presetID="1" presetClass="entr" presetSubtype="0" fill="hold" grpId="0" nodeType="clickEffect">
+                                  <p:stCondLst>
+                                    <p:cond delay="0"/>
+                                  </p:stCondLst>
+                                  <p:childTnLst>
+                                    <p:set>
+                                      <p:cBhvr>
+                                        <p:cTn id="6" dur="1" fill="hold">
+                                          <p:stCondLst>
+                                            <p:cond delay="0"/>
+                                          </p:stCondLst>
+                                        </p:cTn>
+                                        <p:tgtEl>
+                                          <p:spTgt spid="4">
+                                            <p:txEl>
+                                              <p:pRg st="0" end="0"/>
+                                            </p:txEl>
+                                          </p:spTgt>
+                                        </p:tgtEl>
+                                        <p:attrNameLst>
+                                          <p:attrName>style.visibility</p:attrName>
+                                        </p:attrNameLst>
+                                      </p:cBhvr>
+                                      <p:to>
+                                        <p:strVal val="visible"/>
+                                      </p:to>
+                                    </p:set>
+                                  </p:childTnLst>
+                                </p:cTn>
+                              </p:par>
+                            </p:childTnLst>
+                          </p:cTn>
+                        </p:par>
+                      </p:childTnLst>
+                    </p:cTn>
+                  </p:par>
+                </p:childTnLst>
+              </p:cTn>
+              <p:prevCondLst>
+                <p:cond evt="onPrev" delay="0">
+                  <p:tgtEl>
+                    <p:sldTgt/>
+                  </p:tgtEl>
+                </p:cond>
+              </p:prevCondLst>
+              <p:nextCondLst>
+                <p:cond evt="onNext" delay="0">
+                  <p:tgtEl>
+                    <p:sldTgt/>
+                  </p:tgtEl>
+                </p:cond>
+              </p:nextCondLst>
+            </p:seq>
+          </p:childTnLst>
+        </p:cTn>
+      </p:par>
+    </p:tnLst>
+    <p:bldLst>
+      <p:bldP spid="4" grpId="0" uiExpand="1" build="p"/>
+    </p:bldLst>
+  </p:timing>
+</p:sld>
+</file>
+
+<file path=ppt/slides/slide13.xml><?xml version="1.0" encoding="utf-8"?>
+<p:sld xmlns:a="http://schemas.openxmlformats.org/drawingml/2006/main" xmlns:r="http://schemas.openxmlformats.org/officeDocument/2006/relationships" xmlns:p="http://schemas.openxmlformats.org/presentationml/2006/main">
+  <p:cSld>
+    <p:spTree>
+      <p:nvGrpSpPr>
+        <p:cNvPr id="1" name=""/>
+        <p:cNvGrpSpPr/>
+        <p:nvPr/>
+      </p:nvGrpSpPr>
+      <p:grpSpPr>
+        <a:xfrm>
+          <a:off x="0" y="0"/>
+          <a:ext cx="0" cy="0"/>
+          <a:chOff x="0" y="0"/>
+          <a:chExt cx="0" cy="0"/>
+        </a:xfrm>
+      </p:grpSpPr>
+      <p:sp>
+        <p:nvSpPr>
+          <p:cNvPr id="2" name="Title 1">
+            <a:extLst>
+              <a:ext uri="{FF2B5EF4-FFF2-40B4-BE49-F238E27FC236}">
+                <a16:creationId xmlns:a16="http://schemas.microsoft.com/office/drawing/2014/main" id="{8C216D18-5879-951E-312D-F35B3AEFF7CC}"/>
+              </a:ext>
+            </a:extLst>
+          </p:cNvPr>
+          <p:cNvSpPr>
+            <a:spLocks noGrp="1"/>
+          </p:cNvSpPr>
+          <p:nvPr>
+            <p:ph type="title"/>
+          </p:nvPr>
+        </p:nvSpPr>
+        <p:spPr>
+          <a:prstGeom prst="rect">
+            <a:avLst/>
+          </a:prstGeom>
+        </p:spPr>
+        <p:txBody>
+          <a:bodyPr>
+            <a:normAutofit/>
+          </a:bodyPr>
+          <a:lstStyle/>
+          <a:p>
+            <a:r>
+              <a:t>Estimation</a:t>
+            </a:r>
+          </a:p>
+        </p:txBody>
+      </p:sp>
+      <p:sp>
+        <p:nvSpPr>
+          <p:cNvPr id="4" name="Text Placeholder 3">
+            <a:extLst>
+              <a:ext uri="{FF2B5EF4-FFF2-40B4-BE49-F238E27FC236}">
+                <a16:creationId xmlns:a16="http://schemas.microsoft.com/office/drawing/2014/main" id="{824213AC-B520-1C10-5083-9B4C825E476E}"/>
+              </a:ext>
+            </a:extLst>
+          </p:cNvPr>
+          <p:cNvSpPr>
+            <a:spLocks noGrp="1"/>
+          </p:cNvSpPr>
+          <p:nvPr>
+            <p:ph idx="1"/>
+          </p:nvPr>
+        </p:nvSpPr>
+        <p:spPr>
+          <a:xfrm>
+            <a:off x="756745" y="1477880"/>
+            <a:ext cx="3396155" cy="4681181"/>
+          </a:xfrm>
+        </p:spPr>
+        <p:txBody>
+          <a:bodyPr/>
+          <a:lstStyle/>
+          <a:p>
+            <a:pPr lvl="0"/>
+            <a:r>
+              <a:rPr b="1" dirty="0"/>
+              <a:t>Intercept:</a:t>
+            </a:r>
+            <a:r>
+              <a:rPr dirty="0"/>
+              <a:t> Social trust in countries with 0 inequality is expected to be 45.4 on average.</a:t>
+            </a:r>
+          </a:p>
+          <a:p>
+            <a:pPr lvl="0"/>
+            <a:r>
+              <a:rPr b="1" dirty="0"/>
+              <a:t>Slope:</a:t>
+            </a:r>
+            <a:r>
+              <a:rPr dirty="0"/>
+              <a:t> For each additional point increase in Inequality, the model predicts the level of social trust to be lower, on average, by 3.1 points.</a:t>
+            </a:r>
+          </a:p>
+        </p:txBody>
+      </p:sp>
+      <p:sp>
+        <p:nvSpPr>
+          <p:cNvPr id="6" name="Footer Placeholder 5">
+            <a:extLst>
+              <a:ext uri="{FF2B5EF4-FFF2-40B4-BE49-F238E27FC236}">
+                <a16:creationId xmlns:a16="http://schemas.microsoft.com/office/drawing/2014/main" id="{B44277B0-3AC5-0D62-7994-A671EFD6E93E}"/>
+              </a:ext>
+            </a:extLst>
+          </p:cNvPr>
+          <p:cNvSpPr>
+            <a:spLocks noGrp="1"/>
+          </p:cNvSpPr>
+          <p:nvPr>
+            <p:ph type="ftr" sz="quarter" idx="11"/>
+          </p:nvPr>
+        </p:nvSpPr>
+        <p:spPr/>
+        <p:txBody>
+          <a:bodyPr/>
+          <a:lstStyle/>
+          <a:p>
+            <a:endParaRPr lang="en-GB"/>
+          </a:p>
+        </p:txBody>
+      </p:sp>
+      <p:sp>
+        <p:nvSpPr>
+          <p:cNvPr id="5" name="Slide Number Placeholder 8">
+            <a:extLst>
+              <a:ext uri="{FF2B5EF4-FFF2-40B4-BE49-F238E27FC236}">
+                <a16:creationId xmlns:a16="http://schemas.microsoft.com/office/drawing/2014/main" id="{CC8FF6EA-8682-2BC8-E9B8-C6157593BBD6}"/>
+              </a:ext>
+            </a:extLst>
+          </p:cNvPr>
+          <p:cNvSpPr>
+            <a:spLocks noGrp="1"/>
+          </p:cNvSpPr>
+          <p:nvPr>
+            <p:ph type="sldNum" sz="quarter" idx="12"/>
+          </p:nvPr>
+        </p:nvSpPr>
+        <p:spPr/>
+        <p:txBody>
+          <a:bodyPr/>
+          <a:lstStyle/>
+          <a:p>
+            <a:r>
+              <a:rPr lang="en-US" dirty="0"/>
+              <a:t>Slide </a:t>
+            </a:r>
+            <a:fld id="{C5EF2332-01BF-834F-8236-50238282D533}" type="slidenum">
+              <a:rPr lang="en-US" smtClean="0"/>
+              <a:pPr/>
+              <a:t>13</a:t>
+            </a:fld>
+            <a:endParaRPr lang="en-US" dirty="0"/>
+          </a:p>
+        </p:txBody>
+      </p:sp>
+      <p:pic>
+        <p:nvPicPr>
+          <p:cNvPr id="3" name="Picture 1" descr="Week_6_R_files/figure-pptx/unnamed-chunk-3-1.png"/>
+          <p:cNvPicPr>
+            <a:picLocks noGrp="1" noChangeAspect="1"/>
+          </p:cNvPicPr>
+          <p:nvPr/>
+        </p:nvPicPr>
+        <p:blipFill>
+          <a:blip r:embed="rId2"/>
+          <a:stretch>
+            <a:fillRect/>
+          </a:stretch>
+        </p:blipFill>
+        <p:spPr bwMode="auto">
+          <a:xfrm>
+            <a:off x="4385340" y="1667760"/>
+            <a:ext cx="7533317" cy="3766659"/>
+          </a:xfrm>
+          <a:prstGeom prst="rect">
+            <a:avLst/>
+          </a:prstGeom>
+          <a:noFill/>
+          <a:ln w="9525">
+            <a:noFill/>
+            <a:headEnd/>
+            <a:tailEnd/>
+          </a:ln>
+        </p:spPr>
+      </p:pic>
+    </p:spTree>
+  </p:cSld>
+  <p:clrMapOvr>
+    <a:masterClrMapping/>
+  </p:clrMapOvr>
+  <mc:AlternateContent xmlns:mc="http://schemas.openxmlformats.org/markup-compatibility/2006" xmlns:p159="http://schemas.microsoft.com/office/powerpoint/2015/09/main">
+    <mc:Choice Requires="p159">
+      <p:transition spd="slow">
+        <p159:morph option="byObject"/>
+      </p:transition>
+    </mc:Choice>
+    <mc:Fallback xmlns="">
+      <p:transition spd="slow">
+        <p:fade/>
+      </p:transition>
+    </mc:Fallback>
+  </mc:AlternateContent>
+  <p:timing>
+    <p:tnLst>
+      <p:par>
+        <p:cTn id="1" dur="indefinite" restart="never" nodeType="tmRoot">
+          <p:childTnLst>
+            <p:seq concurrent="1" nextAc="seek">
+              <p:cTn id="2" dur="indefinite" nodeType="mainSeq">
+                <p:childTnLst>
+                  <p:par>
+                    <p:cTn id="3" fill="hold">
+                      <p:stCondLst>
+                        <p:cond delay="indefinite"/>
+                      </p:stCondLst>
+                      <p:childTnLst>
+                        <p:par>
+                          <p:cTn id="4" fill="hold">
+                            <p:stCondLst>
+                              <p:cond delay="0"/>
+                            </p:stCondLst>
+                            <p:childTnLst>
+                              <p:par>
+                                <p:cTn id="5" presetID="1" presetClass="entr" presetSubtype="0" fill="hold" grpId="0" nodeType="clickEffect">
+                                  <p:stCondLst>
+                                    <p:cond delay="0"/>
+                                  </p:stCondLst>
+                                  <p:childTnLst>
+                                    <p:set>
+                                      <p:cBhvr>
+                                        <p:cTn id="6" dur="1" fill="hold">
+                                          <p:stCondLst>
+                                            <p:cond delay="0"/>
+                                          </p:stCondLst>
+                                        </p:cTn>
+                                        <p:tgtEl>
+                                          <p:spTgt spid="4">
+                                            <p:txEl>
+                                              <p:pRg st="0" end="0"/>
+                                            </p:txEl>
+                                          </p:spTgt>
+                                        </p:tgtEl>
+                                        <p:attrNameLst>
+                                          <p:attrName>style.visibility</p:attrName>
+                                        </p:attrNameLst>
+                                      </p:cBhvr>
+                                      <p:to>
+                                        <p:strVal val="visible"/>
+                                      </p:to>
+                                    </p:set>
+                                  </p:childTnLst>
+                                </p:cTn>
+                              </p:par>
+                            </p:childTnLst>
+                          </p:cTn>
+                        </p:par>
+                      </p:childTnLst>
+                    </p:cTn>
+                  </p:par>
+                  <p:par>
+                    <p:cTn id="7" fill="hold">
+                      <p:stCondLst>
+                        <p:cond delay="indefinite"/>
+                      </p:stCondLst>
+                      <p:childTnLst>
+                        <p:par>
+                          <p:cTn id="8" fill="hold">
+                            <p:stCondLst>
+                              <p:cond delay="0"/>
+                            </p:stCondLst>
+                            <p:childTnLst>
+                              <p:par>
+                                <p:cTn id="9" presetID="1" presetClass="entr" presetSubtype="0" fill="hold" grpId="0" nodeType="clickEffect">
+                                  <p:stCondLst>
+                                    <p:cond delay="0"/>
+                                  </p:stCondLst>
+                                  <p:childTnLst>
+                                    <p:set>
+                                      <p:cBhvr>
+                                        <p:cTn id="10" dur="1" fill="hold">
+                                          <p:stCondLst>
+                                            <p:cond delay="0"/>
+                                          </p:stCondLst>
+                                        </p:cTn>
+                                        <p:tgtEl>
+                                          <p:spTgt spid="4">
+                                            <p:txEl>
+                                              <p:pRg st="1" end="1"/>
+                                            </p:txEl>
+                                          </p:spTgt>
+                                        </p:tgtEl>
+                                        <p:attrNameLst>
+                                          <p:attrName>style.visibility</p:attrName>
+                                        </p:attrNameLst>
+                                      </p:cBhvr>
+                                      <p:to>
+                                        <p:strVal val="visible"/>
+                                      </p:to>
+                                    </p:set>
+                                  </p:childTnLst>
+                                </p:cTn>
+                              </p:par>
+                            </p:childTnLst>
+                          </p:cTn>
+                        </p:par>
+                      </p:childTnLst>
+                    </p:cTn>
+                  </p:par>
+                </p:childTnLst>
+              </p:cTn>
+              <p:prevCondLst>
+                <p:cond evt="onPrev" delay="0">
+                  <p:tgtEl>
+                    <p:sldTgt/>
+                  </p:tgtEl>
+                </p:cond>
+              </p:prevCondLst>
+              <p:nextCondLst>
+                <p:cond evt="onNext" delay="0">
+                  <p:tgtEl>
+                    <p:sldTgt/>
+                  </p:tgtEl>
+                </p:cond>
+              </p:nextCondLst>
+            </p:seq>
+          </p:childTnLst>
+        </p:cTn>
+      </p:par>
+    </p:tnLst>
+    <p:bldLst>
+      <p:bldP spid="4" grpId="0" uiExpand="1" build="p"/>
+    </p:bldLst>
+  </p:timing>
+</p:sld>
+</file>
+
+<file path=ppt/slides/slide14.xml><?xml version="1.0" encoding="utf-8"?>
+<p:sld xmlns:a="http://schemas.openxmlformats.org/drawingml/2006/main" xmlns:r="http://schemas.openxmlformats.org/officeDocument/2006/relationships" xmlns:p="http://schemas.openxmlformats.org/presentationml/2006/main">
+  <p:cSld>
+    <p:spTree>
+      <p:nvGrpSpPr>
+        <p:cNvPr id="1" name=""/>
+        <p:cNvGrpSpPr/>
+        <p:nvPr/>
+      </p:nvGrpSpPr>
+      <p:grpSpPr>
+        <a:xfrm>
+          <a:off x="0" y="0"/>
+          <a:ext cx="0" cy="0"/>
+          <a:chOff x="0" y="0"/>
+          <a:chExt cx="0" cy="0"/>
+        </a:xfrm>
+      </p:grpSpPr>
       <p:sp>
         <p:nvSpPr>
           <p:cNvPr id="2" name="Title 1"/>
@@ -12037,7 +12632,7 @@
             <a:fld id="{C5EF2332-01BF-834F-8236-50238282D533}" type="slidenum">
               <a:rPr lang="en-US" smtClean="0"/>
               <a:pPr/>
-              <a:t>11</a:t>
+              <a:t>14</a:t>
             </a:fld>
             <a:endParaRPr lang="en-US" dirty="0"/>
           </a:p>
@@ -12310,7 +12905,7 @@
 </p:sld>
 </file>
 
-<file path=ppt/slides/slide12.xml><?xml version="1.0" encoding="utf-8"?>
+<file path=ppt/slides/slide15.xml><?xml version="1.0" encoding="utf-8"?>
 <p:sld xmlns:a="http://schemas.openxmlformats.org/drawingml/2006/main" xmlns:r="http://schemas.openxmlformats.org/officeDocument/2006/relationships" xmlns:p="http://schemas.openxmlformats.org/presentationml/2006/main">
   <p:cSld>
     <p:spTree>
@@ -12411,7 +13006,7 @@
             <a:fld id="{C5EF2332-01BF-834F-8236-50238282D533}" type="slidenum">
               <a:rPr lang="en-US" smtClean="0"/>
               <a:pPr/>
-              <a:t>12</a:t>
+              <a:t>15</a:t>
             </a:fld>
             <a:endParaRPr lang="en-US" dirty="0"/>
           </a:p>
@@ -13217,7 +13812,7 @@
 </p:sld>
 </file>
 
-<file path=ppt/slides/slide13.xml><?xml version="1.0" encoding="utf-8"?>
+<file path=ppt/slides/slide16.xml><?xml version="1.0" encoding="utf-8"?>
 <p:sld xmlns:a="http://schemas.openxmlformats.org/drawingml/2006/main" xmlns:r="http://schemas.openxmlformats.org/officeDocument/2006/relationships" xmlns:p="http://schemas.openxmlformats.org/presentationml/2006/main">
   <p:cSld>
     <p:spTree>
@@ -13324,7 +13919,7 @@
             <a:fld id="{C5EF2332-01BF-834F-8236-50238282D533}" type="slidenum">
               <a:rPr lang="en-US" smtClean="0"/>
               <a:pPr/>
-              <a:t>13</a:t>
+              <a:t>16</a:t>
             </a:fld>
             <a:endParaRPr lang="en-US" dirty="0"/>
           </a:p>
@@ -13454,7 +14049,7 @@
 </p:sld>
 </file>
 
-<file path=ppt/slides/slide14.xml><?xml version="1.0" encoding="utf-8"?>
+<file path=ppt/slides/slide17.xml><?xml version="1.0" encoding="utf-8"?>
 <p:sld xmlns:a="http://schemas.openxmlformats.org/drawingml/2006/main" xmlns:r="http://schemas.openxmlformats.org/officeDocument/2006/relationships" xmlns:p="http://schemas.openxmlformats.org/presentationml/2006/main">
   <p:cSld>
     <p:spTree>
@@ -13555,7 +14150,7 @@
             <a:fld id="{C5EF2332-01BF-834F-8236-50238282D533}" type="slidenum">
               <a:rPr lang="en-US" smtClean="0"/>
               <a:pPr/>
-              <a:t>14</a:t>
+              <a:t>17</a:t>
             </a:fld>
             <a:endParaRPr lang="en-US" dirty="0"/>
           </a:p>
@@ -14080,7 +14675,7 @@
 </p:sld>
 </file>
 
-<file path=ppt/slides/slide15.xml><?xml version="1.0" encoding="utf-8"?>
+<file path=ppt/slides/slide18.xml><?xml version="1.0" encoding="utf-8"?>
 <p:sld xmlns:a="http://schemas.openxmlformats.org/drawingml/2006/main" xmlns:r="http://schemas.openxmlformats.org/officeDocument/2006/relationships" xmlns:p="http://schemas.openxmlformats.org/presentationml/2006/main">
   <p:cSld>
     <p:spTree>
@@ -14177,7 +14772,7 @@
           <a:p>
             <a:fld id="{9FAA51BB-2FC0-4DB8-B50E-F52D50E733B6}" type="slidenum">
               <a:rPr lang="en-GB" smtClean="0"/>
-              <a:t>15</a:t>
+              <a:t>18</a:t>
             </a:fld>
             <a:endParaRPr lang="en-GB"/>
           </a:p>
@@ -14238,7 +14833,7 @@
 </p:sld>
 </file>
 
-<file path=ppt/slides/slide16.xml><?xml version="1.0" encoding="utf-8"?>
+<file path=ppt/slides/slide19.xml><?xml version="1.0" encoding="utf-8"?>
 <p:sld xmlns:a="http://schemas.openxmlformats.org/drawingml/2006/main" xmlns:r="http://schemas.openxmlformats.org/officeDocument/2006/relationships" xmlns:p="http://schemas.openxmlformats.org/presentationml/2006/main">
   <p:cSld>
     <p:spTree>
@@ -14310,7 +14905,193 @@
 </p:sld>
 </file>
 
-<file path=ppt/slides/slide17.xml><?xml version="1.0" encoding="utf-8"?>
+<file path=ppt/slides/slide2.xml><?xml version="1.0" encoding="utf-8"?>
+<p:sld xmlns:a="http://schemas.openxmlformats.org/drawingml/2006/main" xmlns:r="http://schemas.openxmlformats.org/officeDocument/2006/relationships" xmlns:p="http://schemas.openxmlformats.org/presentationml/2006/main">
+  <p:cSld>
+    <p:spTree>
+      <p:nvGrpSpPr>
+        <p:cNvPr id="1" name=""/>
+        <p:cNvGrpSpPr/>
+        <p:nvPr/>
+      </p:nvGrpSpPr>
+      <p:grpSpPr>
+        <a:xfrm>
+          <a:off x="0" y="0"/>
+          <a:ext cx="0" cy="0"/>
+          <a:chOff x="0" y="0"/>
+          <a:chExt cx="0" cy="0"/>
+        </a:xfrm>
+      </p:grpSpPr>
+      <p:sp>
+        <p:nvSpPr>
+          <p:cNvPr id="6" name="Title 5">
+            <a:extLst>
+              <a:ext uri="{FF2B5EF4-FFF2-40B4-BE49-F238E27FC236}">
+                <a16:creationId xmlns:a16="http://schemas.microsoft.com/office/drawing/2014/main" id="{24060982-6EE3-A8F1-75FE-C4BDB2FF3CBE}"/>
+              </a:ext>
+            </a:extLst>
+          </p:cNvPr>
+          <p:cNvSpPr>
+            <a:spLocks noGrp="1"/>
+          </p:cNvSpPr>
+          <p:nvPr>
+            <p:ph type="title"/>
+          </p:nvPr>
+        </p:nvSpPr>
+        <p:spPr/>
+        <p:txBody>
+          <a:bodyPr/>
+          <a:lstStyle/>
+          <a:p>
+            <a:r>
+              <a:rPr lang="en-GB" sz="6000" b="1" dirty="0"/>
+              <a:t>Week 9</a:t>
+            </a:r>
+          </a:p>
+        </p:txBody>
+      </p:sp>
+      <p:sp>
+        <p:nvSpPr>
+          <p:cNvPr id="7" name="Text Placeholder 6">
+            <a:extLst>
+              <a:ext uri="{FF2B5EF4-FFF2-40B4-BE49-F238E27FC236}">
+                <a16:creationId xmlns:a16="http://schemas.microsoft.com/office/drawing/2014/main" id="{E112B5B6-7C9E-9DE5-8D2C-13D42F1FBB68}"/>
+              </a:ext>
+            </a:extLst>
+          </p:cNvPr>
+          <p:cNvSpPr>
+            <a:spLocks noGrp="1"/>
+          </p:cNvSpPr>
+          <p:nvPr>
+            <p:ph type="body" sz="half" idx="2"/>
+          </p:nvPr>
+        </p:nvSpPr>
+        <p:spPr/>
+        <p:txBody>
+          <a:bodyPr>
+            <a:normAutofit/>
+          </a:bodyPr>
+          <a:lstStyle/>
+          <a:p>
+            <a:r>
+              <a:rPr lang="en-GB" sz="3600" dirty="0"/>
+              <a:t>Modelling continuous outcomes</a:t>
+            </a:r>
+          </a:p>
+        </p:txBody>
+      </p:sp>
+      <p:sp>
+        <p:nvSpPr>
+          <p:cNvPr id="3" name="Date Placeholder 2">
+            <a:extLst>
+              <a:ext uri="{FF2B5EF4-FFF2-40B4-BE49-F238E27FC236}">
+                <a16:creationId xmlns:a16="http://schemas.microsoft.com/office/drawing/2014/main" id="{746383FB-FAD5-ACBF-8362-99A44C5BACCD}"/>
+              </a:ext>
+            </a:extLst>
+          </p:cNvPr>
+          <p:cNvSpPr>
+            <a:spLocks noGrp="1"/>
+          </p:cNvSpPr>
+          <p:nvPr>
+            <p:ph type="dt" sz="half" idx="10"/>
+          </p:nvPr>
+        </p:nvSpPr>
+        <p:spPr/>
+        <p:txBody>
+          <a:bodyPr/>
+          <a:lstStyle/>
+          <a:p>
+            <a:r>
+              <a:rPr lang="en-US"/>
+              <a:t>8 October 2024</a:t>
+            </a:r>
+            <a:endParaRPr lang="en-GB"/>
+          </a:p>
+        </p:txBody>
+      </p:sp>
+      <p:sp>
+        <p:nvSpPr>
+          <p:cNvPr id="4" name="Footer Placeholder 3">
+            <a:extLst>
+              <a:ext uri="{FF2B5EF4-FFF2-40B4-BE49-F238E27FC236}">
+                <a16:creationId xmlns:a16="http://schemas.microsoft.com/office/drawing/2014/main" id="{EC4BC908-4805-889D-BE4F-455E3A449AA4}"/>
+              </a:ext>
+            </a:extLst>
+          </p:cNvPr>
+          <p:cNvSpPr>
+            <a:spLocks noGrp="1"/>
+          </p:cNvSpPr>
+          <p:nvPr>
+            <p:ph type="ftr" sz="quarter" idx="11"/>
+          </p:nvPr>
+        </p:nvSpPr>
+        <p:spPr/>
+        <p:txBody>
+          <a:bodyPr/>
+          <a:lstStyle/>
+          <a:p>
+            <a:r>
+              <a:rPr lang="en-GB"/>
+              <a:t>Comparisons and Associations</a:t>
+            </a:r>
+          </a:p>
+        </p:txBody>
+      </p:sp>
+      <p:sp>
+        <p:nvSpPr>
+          <p:cNvPr id="5" name="Slide Number Placeholder 4">
+            <a:extLst>
+              <a:ext uri="{FF2B5EF4-FFF2-40B4-BE49-F238E27FC236}">
+                <a16:creationId xmlns:a16="http://schemas.microsoft.com/office/drawing/2014/main" id="{9E2F49CC-8A5A-2FB3-FD34-139202D1D593}"/>
+              </a:ext>
+            </a:extLst>
+          </p:cNvPr>
+          <p:cNvSpPr>
+            <a:spLocks noGrp="1"/>
+          </p:cNvSpPr>
+          <p:nvPr>
+            <p:ph type="sldNum" sz="quarter" idx="12"/>
+          </p:nvPr>
+        </p:nvSpPr>
+        <p:spPr/>
+        <p:txBody>
+          <a:bodyPr/>
+          <a:lstStyle/>
+          <a:p>
+            <a:fld id="{9FAA51BB-2FC0-4DB8-B50E-F52D50E733B6}" type="slidenum">
+              <a:rPr lang="en-GB" smtClean="0"/>
+              <a:t>2</a:t>
+            </a:fld>
+            <a:endParaRPr lang="en-GB"/>
+          </a:p>
+        </p:txBody>
+      </p:sp>
+    </p:spTree>
+    <p:extLst>
+      <p:ext uri="{BB962C8B-B14F-4D97-AF65-F5344CB8AC3E}">
+        <p14:creationId xmlns:p14="http://schemas.microsoft.com/office/powerpoint/2010/main" val="3814459198"/>
+      </p:ext>
+    </p:extLst>
+  </p:cSld>
+  <p:clrMapOvr>
+    <a:masterClrMapping/>
+  </p:clrMapOvr>
+  <mc:AlternateContent xmlns:mc="http://schemas.openxmlformats.org/markup-compatibility/2006" xmlns:p159="http://schemas.microsoft.com/office/powerpoint/2015/09/main">
+    <mc:Choice Requires="p159">
+      <p:transition spd="slow">
+        <p159:morph option="byObject"/>
+      </p:transition>
+    </mc:Choice>
+    <mc:Fallback xmlns="">
+      <p:transition spd="slow">
+        <p:fade/>
+      </p:transition>
+    </mc:Fallback>
+  </mc:AlternateContent>
+</p:sld>
+</file>
+
+<file path=ppt/slides/slide20.xml><?xml version="1.0" encoding="utf-8"?>
 <p:sld xmlns:a="http://schemas.openxmlformats.org/drawingml/2006/main" xmlns:r="http://schemas.openxmlformats.org/officeDocument/2006/relationships" xmlns:p="http://schemas.openxmlformats.org/presentationml/2006/main">
   <p:cSld>
     <p:spTree>
@@ -14382,79 +15163,7 @@
 </p:sld>
 </file>
 
-<file path=ppt/slides/slide18.xml><?xml version="1.0" encoding="utf-8"?>
-<p:sld xmlns:a="http://schemas.openxmlformats.org/drawingml/2006/main" xmlns:r="http://schemas.openxmlformats.org/officeDocument/2006/relationships" xmlns:p="http://schemas.openxmlformats.org/presentationml/2006/main">
-  <p:cSld>
-    <p:spTree>
-      <p:nvGrpSpPr>
-        <p:cNvPr id="1" name=""/>
-        <p:cNvGrpSpPr/>
-        <p:nvPr/>
-      </p:nvGrpSpPr>
-      <p:grpSpPr>
-        <a:xfrm>
-          <a:off x="0" y="0"/>
-          <a:ext cx="0" cy="0"/>
-          <a:chOff x="0" y="0"/>
-          <a:chExt cx="0" cy="0"/>
-        </a:xfrm>
-      </p:grpSpPr>
-      <p:pic>
-        <p:nvPicPr>
-          <p:cNvPr id="3" name="Picture 2">
-            <a:extLst>
-              <a:ext uri="{FF2B5EF4-FFF2-40B4-BE49-F238E27FC236}">
-                <a16:creationId xmlns:a16="http://schemas.microsoft.com/office/drawing/2014/main" id="{031A31D3-72D3-4C2F-9E46-F962CBDEF629}"/>
-              </a:ext>
-            </a:extLst>
-          </p:cNvPr>
-          <p:cNvPicPr>
-            <a:picLocks noChangeAspect="1"/>
-          </p:cNvPicPr>
-          <p:nvPr/>
-        </p:nvPicPr>
-        <p:blipFill>
-          <a:blip r:embed="rId2"/>
-          <a:stretch>
-            <a:fillRect/>
-          </a:stretch>
-        </p:blipFill>
-        <p:spPr>
-          <a:xfrm>
-            <a:off x="1610418" y="348589"/>
-            <a:ext cx="8971167" cy="5909643"/>
-          </a:xfrm>
-          <a:prstGeom prst="rect">
-            <a:avLst/>
-          </a:prstGeom>
-        </p:spPr>
-      </p:pic>
-    </p:spTree>
-    <p:extLst>
-      <p:ext uri="{BB962C8B-B14F-4D97-AF65-F5344CB8AC3E}">
-        <p14:creationId xmlns:p14="http://schemas.microsoft.com/office/powerpoint/2010/main" val="782263443"/>
-      </p:ext>
-    </p:extLst>
-  </p:cSld>
-  <p:clrMapOvr>
-    <a:masterClrMapping/>
-  </p:clrMapOvr>
-  <mc:AlternateContent xmlns:mc="http://schemas.openxmlformats.org/markup-compatibility/2006" xmlns:p159="http://schemas.microsoft.com/office/powerpoint/2015/09/main">
-    <mc:Choice Requires="p159">
-      <p:transition spd="slow">
-        <p159:morph option="byObject"/>
-      </p:transition>
-    </mc:Choice>
-    <mc:Fallback xmlns="">
-      <p:transition spd="slow">
-        <p:fade/>
-      </p:transition>
-    </mc:Fallback>
-  </mc:AlternateContent>
-</p:sld>
-</file>
-
-<file path=ppt/slides/slide19.xml><?xml version="1.0" encoding="utf-8"?>
+<file path=ppt/slides/slide21.xml><?xml version="1.0" encoding="utf-8"?>
 <p:sld xmlns:a="http://schemas.openxmlformats.org/drawingml/2006/main" xmlns:r="http://schemas.openxmlformats.org/officeDocument/2006/relationships" xmlns:p="http://schemas.openxmlformats.org/presentationml/2006/main">
   <p:cSld>
     <p:spTree>
@@ -14526,193 +15235,7 @@
 </p:sld>
 </file>
 
-<file path=ppt/slides/slide2.xml><?xml version="1.0" encoding="utf-8"?>
-<p:sld xmlns:a="http://schemas.openxmlformats.org/drawingml/2006/main" xmlns:r="http://schemas.openxmlformats.org/officeDocument/2006/relationships" xmlns:p="http://schemas.openxmlformats.org/presentationml/2006/main">
-  <p:cSld>
-    <p:spTree>
-      <p:nvGrpSpPr>
-        <p:cNvPr id="1" name=""/>
-        <p:cNvGrpSpPr/>
-        <p:nvPr/>
-      </p:nvGrpSpPr>
-      <p:grpSpPr>
-        <a:xfrm>
-          <a:off x="0" y="0"/>
-          <a:ext cx="0" cy="0"/>
-          <a:chOff x="0" y="0"/>
-          <a:chExt cx="0" cy="0"/>
-        </a:xfrm>
-      </p:grpSpPr>
-      <p:sp>
-        <p:nvSpPr>
-          <p:cNvPr id="6" name="Title 5">
-            <a:extLst>
-              <a:ext uri="{FF2B5EF4-FFF2-40B4-BE49-F238E27FC236}">
-                <a16:creationId xmlns:a16="http://schemas.microsoft.com/office/drawing/2014/main" id="{24060982-6EE3-A8F1-75FE-C4BDB2FF3CBE}"/>
-              </a:ext>
-            </a:extLst>
-          </p:cNvPr>
-          <p:cNvSpPr>
-            <a:spLocks noGrp="1"/>
-          </p:cNvSpPr>
-          <p:nvPr>
-            <p:ph type="title"/>
-          </p:nvPr>
-        </p:nvSpPr>
-        <p:spPr/>
-        <p:txBody>
-          <a:bodyPr/>
-          <a:lstStyle/>
-          <a:p>
-            <a:r>
-              <a:rPr lang="en-GB" sz="6000" b="1" dirty="0"/>
-              <a:t>Week 9</a:t>
-            </a:r>
-          </a:p>
-        </p:txBody>
-      </p:sp>
-      <p:sp>
-        <p:nvSpPr>
-          <p:cNvPr id="7" name="Text Placeholder 6">
-            <a:extLst>
-              <a:ext uri="{FF2B5EF4-FFF2-40B4-BE49-F238E27FC236}">
-                <a16:creationId xmlns:a16="http://schemas.microsoft.com/office/drawing/2014/main" id="{E112B5B6-7C9E-9DE5-8D2C-13D42F1FBB68}"/>
-              </a:ext>
-            </a:extLst>
-          </p:cNvPr>
-          <p:cNvSpPr>
-            <a:spLocks noGrp="1"/>
-          </p:cNvSpPr>
-          <p:nvPr>
-            <p:ph type="body" sz="half" idx="2"/>
-          </p:nvPr>
-        </p:nvSpPr>
-        <p:spPr/>
-        <p:txBody>
-          <a:bodyPr>
-            <a:normAutofit/>
-          </a:bodyPr>
-          <a:lstStyle/>
-          <a:p>
-            <a:r>
-              <a:rPr lang="en-GB" sz="3600" dirty="0"/>
-              <a:t>Modelling continuous outcomes</a:t>
-            </a:r>
-          </a:p>
-        </p:txBody>
-      </p:sp>
-      <p:sp>
-        <p:nvSpPr>
-          <p:cNvPr id="3" name="Date Placeholder 2">
-            <a:extLst>
-              <a:ext uri="{FF2B5EF4-FFF2-40B4-BE49-F238E27FC236}">
-                <a16:creationId xmlns:a16="http://schemas.microsoft.com/office/drawing/2014/main" id="{746383FB-FAD5-ACBF-8362-99A44C5BACCD}"/>
-              </a:ext>
-            </a:extLst>
-          </p:cNvPr>
-          <p:cNvSpPr>
-            <a:spLocks noGrp="1"/>
-          </p:cNvSpPr>
-          <p:nvPr>
-            <p:ph type="dt" sz="half" idx="10"/>
-          </p:nvPr>
-        </p:nvSpPr>
-        <p:spPr/>
-        <p:txBody>
-          <a:bodyPr/>
-          <a:lstStyle/>
-          <a:p>
-            <a:r>
-              <a:rPr lang="en-US"/>
-              <a:t>8 October 2024</a:t>
-            </a:r>
-            <a:endParaRPr lang="en-GB"/>
-          </a:p>
-        </p:txBody>
-      </p:sp>
-      <p:sp>
-        <p:nvSpPr>
-          <p:cNvPr id="4" name="Footer Placeholder 3">
-            <a:extLst>
-              <a:ext uri="{FF2B5EF4-FFF2-40B4-BE49-F238E27FC236}">
-                <a16:creationId xmlns:a16="http://schemas.microsoft.com/office/drawing/2014/main" id="{EC4BC908-4805-889D-BE4F-455E3A449AA4}"/>
-              </a:ext>
-            </a:extLst>
-          </p:cNvPr>
-          <p:cNvSpPr>
-            <a:spLocks noGrp="1"/>
-          </p:cNvSpPr>
-          <p:nvPr>
-            <p:ph type="ftr" sz="quarter" idx="11"/>
-          </p:nvPr>
-        </p:nvSpPr>
-        <p:spPr/>
-        <p:txBody>
-          <a:bodyPr/>
-          <a:lstStyle/>
-          <a:p>
-            <a:r>
-              <a:rPr lang="en-GB"/>
-              <a:t>Comparisons and Associations</a:t>
-            </a:r>
-          </a:p>
-        </p:txBody>
-      </p:sp>
-      <p:sp>
-        <p:nvSpPr>
-          <p:cNvPr id="5" name="Slide Number Placeholder 4">
-            <a:extLst>
-              <a:ext uri="{FF2B5EF4-FFF2-40B4-BE49-F238E27FC236}">
-                <a16:creationId xmlns:a16="http://schemas.microsoft.com/office/drawing/2014/main" id="{9E2F49CC-8A5A-2FB3-FD34-139202D1D593}"/>
-              </a:ext>
-            </a:extLst>
-          </p:cNvPr>
-          <p:cNvSpPr>
-            <a:spLocks noGrp="1"/>
-          </p:cNvSpPr>
-          <p:nvPr>
-            <p:ph type="sldNum" sz="quarter" idx="12"/>
-          </p:nvPr>
-        </p:nvSpPr>
-        <p:spPr/>
-        <p:txBody>
-          <a:bodyPr/>
-          <a:lstStyle/>
-          <a:p>
-            <a:fld id="{9FAA51BB-2FC0-4DB8-B50E-F52D50E733B6}" type="slidenum">
-              <a:rPr lang="en-GB" smtClean="0"/>
-              <a:t>2</a:t>
-            </a:fld>
-            <a:endParaRPr lang="en-GB"/>
-          </a:p>
-        </p:txBody>
-      </p:sp>
-    </p:spTree>
-    <p:extLst>
-      <p:ext uri="{BB962C8B-B14F-4D97-AF65-F5344CB8AC3E}">
-        <p14:creationId xmlns:p14="http://schemas.microsoft.com/office/powerpoint/2010/main" val="3814459198"/>
-      </p:ext>
-    </p:extLst>
-  </p:cSld>
-  <p:clrMapOvr>
-    <a:masterClrMapping/>
-  </p:clrMapOvr>
-  <mc:AlternateContent xmlns:mc="http://schemas.openxmlformats.org/markup-compatibility/2006" xmlns:p159="http://schemas.microsoft.com/office/powerpoint/2015/09/main">
-    <mc:Choice Requires="p159">
-      <p:transition spd="slow">
-        <p159:morph option="byObject"/>
-      </p:transition>
-    </mc:Choice>
-    <mc:Fallback xmlns="">
-      <p:transition spd="slow">
-        <p:fade/>
-      </p:transition>
-    </mc:Fallback>
-  </mc:AlternateContent>
-</p:sld>
-</file>
-
-<file path=ppt/slides/slide20.xml><?xml version="1.0" encoding="utf-8"?>
+<file path=ppt/slides/slide22.xml><?xml version="1.0" encoding="utf-8"?>
 <p:sld xmlns:a="http://schemas.openxmlformats.org/drawingml/2006/main" xmlns:r="http://schemas.openxmlformats.org/officeDocument/2006/relationships" xmlns:p="http://schemas.openxmlformats.org/presentationml/2006/main">
   <p:cSld>
     <p:spTree>
@@ -15709,7 +16232,7 @@
 </p:sld>
 </file>
 
-<file path=ppt/slides/slide21.xml><?xml version="1.0" encoding="utf-8"?>
+<file path=ppt/slides/slide23.xml><?xml version="1.0" encoding="utf-8"?>
 <p:sld xmlns:a="http://schemas.openxmlformats.org/drawingml/2006/main" xmlns:r="http://schemas.openxmlformats.org/officeDocument/2006/relationships" xmlns:p="http://schemas.openxmlformats.org/presentationml/2006/main">
   <p:cSld>
     <p:spTree>
@@ -15816,210 +16339,7 @@
             <a:fld id="{C5EF2332-01BF-834F-8236-50238282D533}" type="slidenum">
               <a:rPr lang="en-US" smtClean="0"/>
               <a:pPr/>
-              <a:t>21</a:t>
-            </a:fld>
-            <a:endParaRPr lang="en-US" dirty="0"/>
-          </a:p>
-        </p:txBody>
-      </p:sp>
-      <p:sp>
-        <p:nvSpPr>
-          <p:cNvPr id="4" name="Date Placeholder 3">
-            <a:extLst>
-              <a:ext uri="{FF2B5EF4-FFF2-40B4-BE49-F238E27FC236}">
-                <a16:creationId xmlns:a16="http://schemas.microsoft.com/office/drawing/2014/main" id="{A4ACD17F-A726-D793-29D0-2E3448354AF1}"/>
-              </a:ext>
-            </a:extLst>
-          </p:cNvPr>
-          <p:cNvSpPr>
-            <a:spLocks noGrp="1"/>
-          </p:cNvSpPr>
-          <p:nvPr>
-            <p:ph type="dt" sz="half" idx="10"/>
-          </p:nvPr>
-        </p:nvSpPr>
-        <p:spPr/>
-        <p:txBody>
-          <a:bodyPr/>
-          <a:lstStyle/>
-          <a:p>
-            <a:r>
-              <a:rPr lang="en-US"/>
-              <a:t>8 October 2024</a:t>
-            </a:r>
-            <a:endParaRPr lang="en-GB"/>
-          </a:p>
-        </p:txBody>
-      </p:sp>
-      <p:pic>
-        <p:nvPicPr>
-          <p:cNvPr id="7" name="Picture 6" descr="Week_3_R_files/figure-pptx/unnamed-chunk-11-1.png">
-            <a:extLst>
-              <a:ext uri="{FF2B5EF4-FFF2-40B4-BE49-F238E27FC236}">
-                <a16:creationId xmlns:a16="http://schemas.microsoft.com/office/drawing/2014/main" id="{388F4460-24C3-240C-539A-6A4798396CB9}"/>
-              </a:ext>
-            </a:extLst>
-          </p:cNvPr>
-          <p:cNvPicPr>
-            <a:picLocks noGrp="1" noChangeAspect="1"/>
-          </p:cNvPicPr>
-          <p:nvPr/>
-        </p:nvPicPr>
-        <p:blipFill>
-          <a:blip r:embed="rId3"/>
-          <a:stretch>
-            <a:fillRect/>
-          </a:stretch>
-        </p:blipFill>
-        <p:spPr bwMode="auto">
-          <a:xfrm>
-            <a:off x="839343" y="1418843"/>
-            <a:ext cx="8573262" cy="4286631"/>
-          </a:xfrm>
-          <a:prstGeom prst="rect">
-            <a:avLst/>
-          </a:prstGeom>
-          <a:noFill/>
-          <a:ln w="9525">
-            <a:noFill/>
-            <a:headEnd/>
-            <a:tailEnd/>
-          </a:ln>
-        </p:spPr>
-      </p:pic>
-    </p:spTree>
-    <p:extLst>
-      <p:ext uri="{BB962C8B-B14F-4D97-AF65-F5344CB8AC3E}">
-        <p14:creationId xmlns:p14="http://schemas.microsoft.com/office/powerpoint/2010/main" val="3329067806"/>
-      </p:ext>
-    </p:extLst>
-  </p:cSld>
-  <p:clrMapOvr>
-    <a:masterClrMapping/>
-  </p:clrMapOvr>
-  <mc:AlternateContent xmlns:mc="http://schemas.openxmlformats.org/markup-compatibility/2006" xmlns:p159="http://schemas.microsoft.com/office/powerpoint/2015/09/main">
-    <mc:Choice Requires="p159">
-      <p:transition xmlns:p14="http://schemas.microsoft.com/office/powerpoint/2010/main" spd="slow" p14:dur="2000">
-        <p159:morph option="byObject"/>
-      </p:transition>
-    </mc:Choice>
-    <mc:Fallback xmlns="">
-      <p:transition spd="slow">
-        <p:fade/>
-      </p:transition>
-    </mc:Fallback>
-  </mc:AlternateContent>
-</p:sld>
-</file>
-
-<file path=ppt/slides/slide22.xml><?xml version="1.0" encoding="utf-8"?>
-<p:sld xmlns:a="http://schemas.openxmlformats.org/drawingml/2006/main" xmlns:r="http://schemas.openxmlformats.org/officeDocument/2006/relationships" xmlns:p="http://schemas.openxmlformats.org/presentationml/2006/main">
-  <p:cSld>
-    <p:spTree>
-      <p:nvGrpSpPr>
-        <p:cNvPr id="1" name=""/>
-        <p:cNvGrpSpPr/>
-        <p:nvPr/>
-      </p:nvGrpSpPr>
-      <p:grpSpPr>
-        <a:xfrm>
-          <a:off x="0" y="0"/>
-          <a:ext cx="0" cy="0"/>
-          <a:chOff x="0" y="0"/>
-          <a:chExt cx="0" cy="0"/>
-        </a:xfrm>
-      </p:grpSpPr>
-      <p:sp>
-        <p:nvSpPr>
-          <p:cNvPr id="2" name="Title 1"/>
-          <p:cNvSpPr>
-            <a:spLocks noGrp="1"/>
-          </p:cNvSpPr>
-          <p:nvPr>
-            <p:ph type="title" hasCustomPrompt="1"/>
-          </p:nvPr>
-        </p:nvSpPr>
-        <p:spPr>
-          <a:prstGeom prst="rect">
-            <a:avLst/>
-          </a:prstGeom>
-        </p:spPr>
-        <p:txBody>
-          <a:bodyPr>
-            <a:normAutofit/>
-          </a:bodyPr>
-          <a:lstStyle/>
-          <a:p>
-            <a:r>
-              <a:rPr lang="en-GB" dirty="0"/>
-              <a:t>Inequality + Region </a:t>
-            </a:r>
-            <a:r>
-              <a:rPr lang="en-GB" b="0" dirty="0">
-                <a:sym typeface="Wingdings" panose="05000000000000000000" pitchFamily="2" charset="2"/>
-              </a:rPr>
-              <a:t></a:t>
-            </a:r>
-            <a:r>
-              <a:rPr lang="en-GB" dirty="0">
-                <a:sym typeface="Wingdings" panose="05000000000000000000" pitchFamily="2" charset="2"/>
-              </a:rPr>
-              <a:t> </a:t>
-            </a:r>
-            <a:r>
-              <a:rPr lang="en-GB" dirty="0"/>
-              <a:t>Social trust</a:t>
-            </a:r>
-            <a:endParaRPr dirty="0"/>
-          </a:p>
-        </p:txBody>
-      </p:sp>
-      <p:sp>
-        <p:nvSpPr>
-          <p:cNvPr id="5" name="Footer Placeholder 4"/>
-          <p:cNvSpPr>
-            <a:spLocks noGrp="1"/>
-          </p:cNvSpPr>
-          <p:nvPr>
-            <p:ph type="ftr" sz="quarter" idx="11"/>
-          </p:nvPr>
-        </p:nvSpPr>
-        <p:spPr/>
-        <p:txBody>
-          <a:bodyPr/>
-          <a:lstStyle/>
-          <a:p>
-            <a:r>
-              <a:rPr lang="en-US"/>
-              <a:t>Comparisons and Associations</a:t>
-            </a:r>
-            <a:endParaRPr lang="en-US" dirty="0"/>
-          </a:p>
-        </p:txBody>
-      </p:sp>
-      <p:sp>
-        <p:nvSpPr>
-          <p:cNvPr id="6" name="Slide Number Placeholder 5"/>
-          <p:cNvSpPr>
-            <a:spLocks noGrp="1"/>
-          </p:cNvSpPr>
-          <p:nvPr>
-            <p:ph type="sldNum" sz="quarter" idx="12"/>
-          </p:nvPr>
-        </p:nvSpPr>
-        <p:spPr/>
-        <p:txBody>
-          <a:bodyPr/>
-          <a:lstStyle/>
-          <a:p>
-            <a:r>
-              <a:rPr lang="en-US" dirty="0"/>
-              <a:t>Slide </a:t>
-            </a:r>
-            <a:fld id="{C5EF2332-01BF-834F-8236-50238282D533}" type="slidenum">
-              <a:rPr lang="en-US" smtClean="0"/>
-              <a:pPr/>
-              <a:t>22</a:t>
+              <a:t>23</a:t>
             </a:fld>
             <a:endParaRPr lang="en-US" dirty="0"/>
           </a:p>
@@ -16249,192 +16569,6 @@
 </p:sld>
 </file>
 
-<file path=ppt/slides/slide23.xml><?xml version="1.0" encoding="utf-8"?>
-<p:sld xmlns:a="http://schemas.openxmlformats.org/drawingml/2006/main" xmlns:r="http://schemas.openxmlformats.org/officeDocument/2006/relationships" xmlns:p="http://schemas.openxmlformats.org/presentationml/2006/main">
-  <p:cSld>
-    <p:spTree>
-      <p:nvGrpSpPr>
-        <p:cNvPr id="1" name=""/>
-        <p:cNvGrpSpPr/>
-        <p:nvPr/>
-      </p:nvGrpSpPr>
-      <p:grpSpPr>
-        <a:xfrm>
-          <a:off x="0" y="0"/>
-          <a:ext cx="0" cy="0"/>
-          <a:chOff x="0" y="0"/>
-          <a:chExt cx="0" cy="0"/>
-        </a:xfrm>
-      </p:grpSpPr>
-      <p:sp>
-        <p:nvSpPr>
-          <p:cNvPr id="7" name="Title 6">
-            <a:extLst>
-              <a:ext uri="{FF2B5EF4-FFF2-40B4-BE49-F238E27FC236}">
-                <a16:creationId xmlns:a16="http://schemas.microsoft.com/office/drawing/2014/main" id="{FF2CBA3A-E59C-1E5C-37CA-CD0F1E185ED5}"/>
-              </a:ext>
-            </a:extLst>
-          </p:cNvPr>
-          <p:cNvSpPr>
-            <a:spLocks noGrp="1"/>
-          </p:cNvSpPr>
-          <p:nvPr>
-            <p:ph type="title"/>
-          </p:nvPr>
-        </p:nvSpPr>
-        <p:spPr/>
-        <p:txBody>
-          <a:bodyPr/>
-          <a:lstStyle/>
-          <a:p>
-            <a:r>
-              <a:rPr lang="en-GB" dirty="0"/>
-              <a:t>Workshop</a:t>
-            </a:r>
-          </a:p>
-        </p:txBody>
-      </p:sp>
-      <p:sp>
-        <p:nvSpPr>
-          <p:cNvPr id="8" name="Text Placeholder 7">
-            <a:extLst>
-              <a:ext uri="{FF2B5EF4-FFF2-40B4-BE49-F238E27FC236}">
-                <a16:creationId xmlns:a16="http://schemas.microsoft.com/office/drawing/2014/main" id="{636F7FD2-53FA-4A51-9681-6FC5C8960063}"/>
-              </a:ext>
-            </a:extLst>
-          </p:cNvPr>
-          <p:cNvSpPr>
-            <a:spLocks noGrp="1"/>
-          </p:cNvSpPr>
-          <p:nvPr>
-            <p:ph type="body" sz="half" idx="2"/>
-          </p:nvPr>
-        </p:nvSpPr>
-        <p:spPr/>
-        <p:txBody>
-          <a:bodyPr/>
-          <a:lstStyle/>
-          <a:p>
-            <a:r>
-              <a:rPr lang="en-GB" dirty="0"/>
-              <a:t>1-3pm</a:t>
-            </a:r>
-          </a:p>
-        </p:txBody>
-      </p:sp>
-      <p:sp>
-        <p:nvSpPr>
-          <p:cNvPr id="4" name="Date Placeholder 3">
-            <a:extLst>
-              <a:ext uri="{FF2B5EF4-FFF2-40B4-BE49-F238E27FC236}">
-                <a16:creationId xmlns:a16="http://schemas.microsoft.com/office/drawing/2014/main" id="{7452334B-2A42-251C-845C-1CED233665F2}"/>
-              </a:ext>
-            </a:extLst>
-          </p:cNvPr>
-          <p:cNvSpPr>
-            <a:spLocks noGrp="1"/>
-          </p:cNvSpPr>
-          <p:nvPr>
-            <p:ph type="dt" sz="half" idx="10"/>
-          </p:nvPr>
-        </p:nvSpPr>
-        <p:spPr/>
-        <p:txBody>
-          <a:bodyPr/>
-          <a:lstStyle/>
-          <a:p>
-            <a:r>
-              <a:rPr lang="en-US"/>
-              <a:t>8 October 2024</a:t>
-            </a:r>
-            <a:endParaRPr lang="en-GB"/>
-          </a:p>
-        </p:txBody>
-      </p:sp>
-      <p:sp>
-        <p:nvSpPr>
-          <p:cNvPr id="5" name="Footer Placeholder 4">
-            <a:extLst>
-              <a:ext uri="{FF2B5EF4-FFF2-40B4-BE49-F238E27FC236}">
-                <a16:creationId xmlns:a16="http://schemas.microsoft.com/office/drawing/2014/main" id="{E7848055-4F62-3048-C4D2-554FF0041ADC}"/>
-              </a:ext>
-            </a:extLst>
-          </p:cNvPr>
-          <p:cNvSpPr>
-            <a:spLocks noGrp="1"/>
-          </p:cNvSpPr>
-          <p:nvPr>
-            <p:ph type="ftr" sz="quarter" idx="11"/>
-          </p:nvPr>
-        </p:nvSpPr>
-        <p:spPr/>
-        <p:txBody>
-          <a:bodyPr/>
-          <a:lstStyle/>
-          <a:p>
-            <a:r>
-              <a:rPr lang="en-GB"/>
-              <a:t>Comparisons and Associations</a:t>
-            </a:r>
-            <a:endParaRPr lang="en-GB" dirty="0"/>
-          </a:p>
-        </p:txBody>
-      </p:sp>
-      <p:sp>
-        <p:nvSpPr>
-          <p:cNvPr id="6" name="Slide Number Placeholder 5">
-            <a:extLst>
-              <a:ext uri="{FF2B5EF4-FFF2-40B4-BE49-F238E27FC236}">
-                <a16:creationId xmlns:a16="http://schemas.microsoft.com/office/drawing/2014/main" id="{70535960-24E1-CFDC-22DF-A828C2B2C10E}"/>
-              </a:ext>
-            </a:extLst>
-          </p:cNvPr>
-          <p:cNvSpPr>
-            <a:spLocks noGrp="1"/>
-          </p:cNvSpPr>
-          <p:nvPr>
-            <p:ph type="sldNum" sz="quarter" idx="12"/>
-          </p:nvPr>
-        </p:nvSpPr>
-        <p:spPr/>
-        <p:txBody>
-          <a:bodyPr/>
-          <a:lstStyle/>
-          <a:p>
-            <a:fld id="{9FAA51BB-2FC0-4DB8-B50E-F52D50E733B6}" type="slidenum">
-              <a:rPr lang="en-GB" smtClean="0"/>
-              <a:pPr/>
-              <a:t>23</a:t>
-            </a:fld>
-            <a:endParaRPr lang="en-GB" dirty="0"/>
-          </a:p>
-        </p:txBody>
-      </p:sp>
-    </p:spTree>
-    <p:extLst>
-      <p:ext uri="{BB962C8B-B14F-4D97-AF65-F5344CB8AC3E}">
-        <p14:creationId xmlns:p14="http://schemas.microsoft.com/office/powerpoint/2010/main" val="253129452"/>
-      </p:ext>
-    </p:extLst>
-  </p:cSld>
-  <p:clrMapOvr>
-    <a:masterClrMapping/>
-  </p:clrMapOvr>
-  <mc:AlternateContent xmlns:mc="http://schemas.openxmlformats.org/markup-compatibility/2006" xmlns:p159="http://schemas.microsoft.com/office/powerpoint/2015/09/main">
-    <mc:Choice Requires="p159">
-      <p:transition spd="slow">
-        <p159:morph option="byObject"/>
-      </p:transition>
-    </mc:Choice>
-    <mc:Fallback xmlns="">
-      <p:transition spd="slow">
-        <p:fade/>
-      </p:transition>
-    </mc:Fallback>
-  </mc:AlternateContent>
-</p:sld>
-</file>
-
 <file path=ppt/slides/slide24.xml><?xml version="1.0" encoding="utf-8"?>
 <p:sld xmlns:a="http://schemas.openxmlformats.org/drawingml/2006/main" xmlns:r="http://schemas.openxmlformats.org/officeDocument/2006/relationships" xmlns:p="http://schemas.openxmlformats.org/presentationml/2006/main">
   <p:cSld>
@@ -16457,7 +16591,7 @@
           <p:cNvPr id="7" name="Title 6">
             <a:extLst>
               <a:ext uri="{FF2B5EF4-FFF2-40B4-BE49-F238E27FC236}">
-                <a16:creationId xmlns:a16="http://schemas.microsoft.com/office/drawing/2014/main" id="{75BCA108-CB1D-5541-DFA5-C4B6F5FB8C65}"/>
+                <a16:creationId xmlns:a16="http://schemas.microsoft.com/office/drawing/2014/main" id="{FF2CBA3A-E59C-1E5C-37CA-CD0F1E185ED5}"/>
               </a:ext>
             </a:extLst>
           </p:cNvPr>
@@ -16475,17 +16609,17 @@
           <a:p>
             <a:r>
               <a:rPr lang="en-GB" dirty="0"/>
-              <a:t>Assignment Questions</a:t>
-            </a:r>
-          </a:p>
-        </p:txBody>
-      </p:sp>
-      <p:sp>
-        <p:nvSpPr>
-          <p:cNvPr id="8" name="Content Placeholder 7">
+              <a:t>Workshop</a:t>
+            </a:r>
+          </a:p>
+        </p:txBody>
+      </p:sp>
+      <p:sp>
+        <p:nvSpPr>
+          <p:cNvPr id="8" name="Text Placeholder 7">
             <a:extLst>
               <a:ext uri="{FF2B5EF4-FFF2-40B4-BE49-F238E27FC236}">
-                <a16:creationId xmlns:a16="http://schemas.microsoft.com/office/drawing/2014/main" id="{00E86ADC-9F29-16A6-FCC9-F4480732B527}"/>
+                <a16:creationId xmlns:a16="http://schemas.microsoft.com/office/drawing/2014/main" id="{636F7FD2-53FA-4A51-9681-6FC5C8960063}"/>
               </a:ext>
             </a:extLst>
           </p:cNvPr>
@@ -16493,167 +16627,17 @@
             <a:spLocks noGrp="1"/>
           </p:cNvSpPr>
           <p:nvPr>
-            <p:ph idx="1"/>
+            <p:ph type="body" sz="half" idx="2"/>
           </p:nvPr>
         </p:nvSpPr>
         <p:spPr/>
         <p:txBody>
-          <a:bodyPr>
-            <a:normAutofit lnSpcReduction="10000"/>
-          </a:bodyPr>
+          <a:bodyPr/>
           <a:lstStyle/>
           <a:p>
             <a:r>
               <a:rPr lang="en-GB" dirty="0"/>
-              <a:t>A.  Are </a:t>
-            </a:r>
-            <a:r>
-              <a:rPr lang="en-GB" b="1" dirty="0"/>
-              <a:t>religious</a:t>
-            </a:r>
-            <a:r>
-              <a:rPr lang="en-GB" dirty="0"/>
-              <a:t> people more </a:t>
-            </a:r>
-            <a:r>
-              <a:rPr lang="en-GB" b="1" dirty="0"/>
-              <a:t>satisfied</a:t>
-            </a:r>
-            <a:r>
-              <a:rPr lang="en-GB" dirty="0"/>
-              <a:t> with life?</a:t>
-            </a:r>
-          </a:p>
-          <a:p>
-            <a:r>
-              <a:rPr lang="en-GB" dirty="0"/>
-              <a:t>B.  Are </a:t>
-            </a:r>
-            <a:r>
-              <a:rPr lang="en-GB" b="1" dirty="0"/>
-              <a:t>older</a:t>
-            </a:r>
-            <a:r>
-              <a:rPr lang="en-GB" dirty="0"/>
-              <a:t> people more likely to see the </a:t>
-            </a:r>
-            <a:r>
-              <a:rPr lang="en-GB" b="1" dirty="0"/>
-              <a:t>death penalty as justifiable</a:t>
-            </a:r>
-            <a:r>
-              <a:rPr lang="en-GB" dirty="0"/>
-              <a:t>?</a:t>
-            </a:r>
-          </a:p>
-          <a:p>
-            <a:r>
-              <a:rPr lang="en-GB" dirty="0"/>
-              <a:t>C.  What </a:t>
-            </a:r>
-            <a:r>
-              <a:rPr lang="en-GB" b="1" dirty="0"/>
-              <a:t>factors</a:t>
-            </a:r>
-            <a:r>
-              <a:rPr lang="en-GB" dirty="0"/>
-              <a:t> are associated with </a:t>
-            </a:r>
-            <a:r>
-              <a:rPr lang="en-GB" b="1" dirty="0"/>
-              <a:t>opinions about future European Union enlargement </a:t>
-            </a:r>
-            <a:r>
-              <a:rPr lang="en-GB" dirty="0"/>
-              <a:t>among Europeans?</a:t>
-            </a:r>
-          </a:p>
-          <a:p>
-            <a:r>
-              <a:rPr lang="en-GB" dirty="0"/>
-              <a:t>D.  Is higher </a:t>
-            </a:r>
-            <a:r>
-              <a:rPr lang="en-GB" b="1" dirty="0"/>
-              <a:t>internet use </a:t>
-            </a:r>
-            <a:r>
-              <a:rPr lang="en-GB" dirty="0"/>
-              <a:t>associated with stronger </a:t>
-            </a:r>
-            <a:r>
-              <a:rPr lang="en-GB" b="1" dirty="0"/>
-              <a:t>anti-immigrant sentiments</a:t>
-            </a:r>
-            <a:r>
-              <a:rPr lang="en-GB" dirty="0"/>
-              <a:t>?</a:t>
-            </a:r>
-          </a:p>
-          <a:p>
-            <a:r>
-              <a:rPr lang="en-GB" dirty="0"/>
-              <a:t>E.  How does </a:t>
-            </a:r>
-            <a:r>
-              <a:rPr lang="en-GB" b="1" dirty="0"/>
-              <a:t>victimisation</a:t>
-            </a:r>
-            <a:r>
-              <a:rPr lang="en-GB" dirty="0"/>
-              <a:t> relate to </a:t>
-            </a:r>
-            <a:r>
-              <a:rPr lang="en-GB" b="1" dirty="0"/>
-              <a:t>trust in the police</a:t>
-            </a:r>
-            <a:r>
-              <a:rPr lang="en-GB" dirty="0"/>
-              <a:t>?</a:t>
-            </a:r>
-          </a:p>
-          <a:p>
-            <a:r>
-              <a:rPr lang="en-GB" dirty="0"/>
-              <a:t>F.  What </a:t>
-            </a:r>
-            <a:r>
-              <a:rPr lang="en-GB" b="1" dirty="0"/>
-              <a:t>factors</a:t>
-            </a:r>
-            <a:r>
-              <a:rPr lang="en-GB" dirty="0"/>
-              <a:t> are associated with </a:t>
-            </a:r>
-            <a:r>
-              <a:rPr lang="en-GB" b="1" dirty="0"/>
-              <a:t>belief in life after death</a:t>
-            </a:r>
-            <a:r>
-              <a:rPr lang="en-GB" dirty="0"/>
-              <a:t>?</a:t>
-            </a:r>
-          </a:p>
-          <a:p>
-            <a:r>
-              <a:rPr lang="en-GB" dirty="0"/>
-              <a:t>G.  Are government/public </a:t>
-            </a:r>
-            <a:r>
-              <a:rPr lang="en-GB" b="1" dirty="0"/>
-              <a:t>sector</a:t>
-            </a:r>
-            <a:r>
-              <a:rPr lang="en-GB" dirty="0"/>
-              <a:t> employees more inclined to </a:t>
-            </a:r>
-            <a:r>
-              <a:rPr lang="en-GB" b="1" dirty="0"/>
-              <a:t>perceive higher levels of corruption</a:t>
-            </a:r>
-            <a:r>
-              <a:rPr lang="en-GB" dirty="0"/>
-              <a:t> than those working in the private sector?</a:t>
+              <a:t>1-3pm</a:t>
             </a:r>
           </a:p>
         </p:txBody>
@@ -16663,7 +16647,7 @@
           <p:cNvPr id="4" name="Date Placeholder 3">
             <a:extLst>
               <a:ext uri="{FF2B5EF4-FFF2-40B4-BE49-F238E27FC236}">
-                <a16:creationId xmlns:a16="http://schemas.microsoft.com/office/drawing/2014/main" id="{5F74CD3D-6209-B71E-328E-3CEE4431F3F5}"/>
+                <a16:creationId xmlns:a16="http://schemas.microsoft.com/office/drawing/2014/main" id="{7452334B-2A42-251C-845C-1CED233665F2}"/>
               </a:ext>
             </a:extLst>
           </p:cNvPr>
@@ -16692,7 +16676,7 @@
           <p:cNvPr id="5" name="Footer Placeholder 4">
             <a:extLst>
               <a:ext uri="{FF2B5EF4-FFF2-40B4-BE49-F238E27FC236}">
-                <a16:creationId xmlns:a16="http://schemas.microsoft.com/office/drawing/2014/main" id="{DE0B2AC9-C062-ACDA-78EB-2E5B2DF3BA3F}"/>
+                <a16:creationId xmlns:a16="http://schemas.microsoft.com/office/drawing/2014/main" id="{E7848055-4F62-3048-C4D2-554FF0041ADC}"/>
               </a:ext>
             </a:extLst>
           </p:cNvPr>
@@ -16712,6 +16696,7 @@
               <a:rPr lang="en-GB"/>
               <a:t>Comparisons and Associations</a:t>
             </a:r>
+            <a:endParaRPr lang="en-GB" dirty="0"/>
           </a:p>
         </p:txBody>
       </p:sp>
@@ -16720,7 +16705,7 @@
           <p:cNvPr id="6" name="Slide Number Placeholder 5">
             <a:extLst>
               <a:ext uri="{FF2B5EF4-FFF2-40B4-BE49-F238E27FC236}">
-                <a16:creationId xmlns:a16="http://schemas.microsoft.com/office/drawing/2014/main" id="{63AA58D7-3FC7-1868-4188-EE9D3329FE70}"/>
+                <a16:creationId xmlns:a16="http://schemas.microsoft.com/office/drawing/2014/main" id="{70535960-24E1-CFDC-22DF-A828C2B2C10E}"/>
               </a:ext>
             </a:extLst>
           </p:cNvPr>
@@ -16738,16 +16723,17 @@
           <a:p>
             <a:fld id="{9FAA51BB-2FC0-4DB8-B50E-F52D50E733B6}" type="slidenum">
               <a:rPr lang="en-GB" smtClean="0"/>
+              <a:pPr/>
               <a:t>24</a:t>
             </a:fld>
-            <a:endParaRPr lang="en-GB"/>
+            <a:endParaRPr lang="en-GB" dirty="0"/>
           </a:p>
         </p:txBody>
       </p:sp>
     </p:spTree>
     <p:extLst>
       <p:ext uri="{BB962C8B-B14F-4D97-AF65-F5344CB8AC3E}">
-        <p14:creationId xmlns:p14="http://schemas.microsoft.com/office/powerpoint/2010/main" val="1301853266"/>
+        <p14:creationId xmlns:p14="http://schemas.microsoft.com/office/powerpoint/2010/main" val="253129452"/>
       </p:ext>
     </p:extLst>
   </p:cSld>
